--- a/lectures/Project.pptx
+++ b/lectures/Project.pptx
@@ -5,7 +5,7 @@
     <p:sldMasterId id="2147484268" r:id="rId1"/>
   </p:sldMasterIdLst>
   <p:notesMasterIdLst>
-    <p:notesMasterId r:id="rId15"/>
+    <p:notesMasterId r:id="rId17"/>
   </p:notesMasterIdLst>
   <p:sldIdLst>
     <p:sldId id="256" r:id="rId2"/>
@@ -20,7 +20,9 @@
     <p:sldId id="279" r:id="rId11"/>
     <p:sldId id="280" r:id="rId12"/>
     <p:sldId id="281" r:id="rId13"/>
-    <p:sldId id="282" r:id="rId14"/>
+    <p:sldId id="283" r:id="rId14"/>
+    <p:sldId id="282" r:id="rId15"/>
+    <p:sldId id="284" r:id="rId16"/>
   </p:sldIdLst>
   <p:sldSz cx="12192000" cy="6858000"/>
   <p:notesSz cx="6858000" cy="9144000"/>
@@ -354,7 +356,7 @@
           <a:p>
             <a:fld id="{4DDA272F-59C1-4644-BCBC-A6C8D77499CA}" type="datetimeFigureOut">
               <a:rPr lang="en-SE" smtClean="0"/>
-              <a:t>2024-11-08</a:t>
+              <a:t>2025-11-19</a:t>
             </a:fld>
             <a:endParaRPr lang="en-SE"/>
           </a:p>
@@ -667,12 +669,8 @@
           <a:lstStyle/>
           <a:p>
             <a:r>
-              <a:rPr lang="en-GB" dirty="0"/>
-              <a:t>C</a:t>
-            </a:r>
-            <a:r>
               <a:rPr lang="en-SE" dirty="0"/>
-              <a:t>ytoplasmic part is larger</a:t>
+              <a:t>The project is related to a disease called cystic fibrosis. </a:t>
             </a:r>
           </a:p>
         </p:txBody>
@@ -694,7 +692,7 @@
           <a:p>
             <a:fld id="{CB8D2482-335E-734C-B42B-0D7FE3343100}" type="slidenum">
               <a:rPr lang="en-SE" smtClean="0"/>
-              <a:t>4</a:t>
+              <a:t>3</a:t>
             </a:fld>
             <a:endParaRPr lang="en-SE"/>
           </a:p>
@@ -703,7 +701,7 @@
     </p:spTree>
     <p:extLst>
       <p:ext uri="{BB962C8B-B14F-4D97-AF65-F5344CB8AC3E}">
-        <p14:creationId xmlns:p14="http://schemas.microsoft.com/office/powerpoint/2010/main" val="2595251316"/>
+        <p14:creationId xmlns:p14="http://schemas.microsoft.com/office/powerpoint/2010/main" val="2948861682"/>
       </p:ext>
     </p:extLst>
   </p:cSld>
@@ -759,11 +757,11 @@
           <a:p>
             <a:r>
               <a:rPr lang="en-GB" dirty="0"/>
-              <a:t>S</a:t>
+              <a:t>C</a:t>
             </a:r>
             <a:r>
               <a:rPr lang="en-SE" dirty="0"/>
-              <a:t>top codon: TAA, TAG or TGA</a:t>
+              <a:t>ytoplasmic part is larger</a:t>
             </a:r>
           </a:p>
         </p:txBody>
@@ -785,7 +783,7 @@
           <a:p>
             <a:fld id="{CB8D2482-335E-734C-B42B-0D7FE3343100}" type="slidenum">
               <a:rPr lang="en-SE" smtClean="0"/>
-              <a:t>5</a:t>
+              <a:t>4</a:t>
             </a:fld>
             <a:endParaRPr lang="en-SE"/>
           </a:p>
@@ -794,7 +792,7 @@
     </p:spTree>
     <p:extLst>
       <p:ext uri="{BB962C8B-B14F-4D97-AF65-F5344CB8AC3E}">
-        <p14:creationId xmlns:p14="http://schemas.microsoft.com/office/powerpoint/2010/main" val="4206755442"/>
+        <p14:creationId xmlns:p14="http://schemas.microsoft.com/office/powerpoint/2010/main" val="2595251316"/>
       </p:ext>
     </p:extLst>
   </p:cSld>
@@ -848,7 +846,20 @@
           <a:bodyPr/>
           <a:lstStyle/>
           <a:p>
-            <a:endParaRPr lang="en-SE" dirty="0"/>
+            <a:r>
+              <a:rPr lang="en-GB" dirty="0"/>
+              <a:t>S</a:t>
+            </a:r>
+            <a:r>
+              <a:rPr lang="en-SE" dirty="0"/>
+              <a:t>top codon: TAA, TAG or TGA</a:t>
+            </a:r>
+          </a:p>
+          <a:p>
+            <a:r>
+              <a:rPr lang="en-SE" dirty="0"/>
+              <a:t>Non-synonymous mutation, means the amino acid will be changed caused by mutation.</a:t>
+            </a:r>
           </a:p>
         </p:txBody>
       </p:sp>
@@ -869,7 +880,181 @@
           <a:p>
             <a:fld id="{CB8D2482-335E-734C-B42B-0D7FE3343100}" type="slidenum">
               <a:rPr lang="en-SE" smtClean="0"/>
-              <a:t>13</a:t>
+              <a:t>5</a:t>
+            </a:fld>
+            <a:endParaRPr lang="en-SE"/>
+          </a:p>
+        </p:txBody>
+      </p:sp>
+    </p:spTree>
+    <p:extLst>
+      <p:ext uri="{BB962C8B-B14F-4D97-AF65-F5344CB8AC3E}">
+        <p14:creationId xmlns:p14="http://schemas.microsoft.com/office/powerpoint/2010/main" val="4206755442"/>
+      </p:ext>
+    </p:extLst>
+  </p:cSld>
+  <p:clrMapOvr>
+    <a:masterClrMapping/>
+  </p:clrMapOvr>
+</p:notes>
+</file>
+
+<file path=ppt/notesSlides/notesSlide4.xml><?xml version="1.0" encoding="utf-8"?>
+<p:notes xmlns:a="http://schemas.openxmlformats.org/drawingml/2006/main" xmlns:r="http://schemas.openxmlformats.org/officeDocument/2006/relationships" xmlns:p="http://schemas.openxmlformats.org/presentationml/2006/main">
+  <p:cSld>
+    <p:spTree>
+      <p:nvGrpSpPr>
+        <p:cNvPr id="1" name=""/>
+        <p:cNvGrpSpPr/>
+        <p:nvPr/>
+      </p:nvGrpSpPr>
+      <p:grpSpPr>
+        <a:xfrm>
+          <a:off x="0" y="0"/>
+          <a:ext cx="0" cy="0"/>
+          <a:chOff x="0" y="0"/>
+          <a:chExt cx="0" cy="0"/>
+        </a:xfrm>
+      </p:grpSpPr>
+      <p:sp>
+        <p:nvSpPr>
+          <p:cNvPr id="2" name="Slide Image Placeholder 1"/>
+          <p:cNvSpPr>
+            <a:spLocks noGrp="1" noRot="1" noChangeAspect="1"/>
+          </p:cNvSpPr>
+          <p:nvPr>
+            <p:ph type="sldImg"/>
+          </p:nvPr>
+        </p:nvSpPr>
+        <p:spPr/>
+      </p:sp>
+      <p:sp>
+        <p:nvSpPr>
+          <p:cNvPr id="3" name="Notes Placeholder 2"/>
+          <p:cNvSpPr>
+            <a:spLocks noGrp="1"/>
+          </p:cNvSpPr>
+          <p:nvPr>
+            <p:ph type="body" idx="1"/>
+          </p:nvPr>
+        </p:nvSpPr>
+        <p:spPr/>
+        <p:txBody>
+          <a:bodyPr/>
+          <a:lstStyle/>
+          <a:p>
+            <a:r>
+              <a:rPr lang="en-SE" dirty="0"/>
+              <a:t>GTF: gene transfer format</a:t>
+            </a:r>
+          </a:p>
+          <a:p>
+            <a:endParaRPr lang="en-SE" dirty="0"/>
+          </a:p>
+        </p:txBody>
+      </p:sp>
+      <p:sp>
+        <p:nvSpPr>
+          <p:cNvPr id="4" name="Slide Number Placeholder 3"/>
+          <p:cNvSpPr>
+            <a:spLocks noGrp="1"/>
+          </p:cNvSpPr>
+          <p:nvPr>
+            <p:ph type="sldNum" sz="quarter" idx="5"/>
+          </p:nvPr>
+        </p:nvSpPr>
+        <p:spPr/>
+        <p:txBody>
+          <a:bodyPr/>
+          <a:lstStyle/>
+          <a:p>
+            <a:fld id="{CB8D2482-335E-734C-B42B-0D7FE3343100}" type="slidenum">
+              <a:rPr lang="en-SE" smtClean="0"/>
+              <a:t>7</a:t>
+            </a:fld>
+            <a:endParaRPr lang="en-SE"/>
+          </a:p>
+        </p:txBody>
+      </p:sp>
+    </p:spTree>
+    <p:extLst>
+      <p:ext uri="{BB962C8B-B14F-4D97-AF65-F5344CB8AC3E}">
+        <p14:creationId xmlns:p14="http://schemas.microsoft.com/office/powerpoint/2010/main" val="3224299602"/>
+      </p:ext>
+    </p:extLst>
+  </p:cSld>
+  <p:clrMapOvr>
+    <a:masterClrMapping/>
+  </p:clrMapOvr>
+</p:notes>
+</file>
+
+<file path=ppt/notesSlides/notesSlide5.xml><?xml version="1.0" encoding="utf-8"?>
+<p:notes xmlns:a="http://schemas.openxmlformats.org/drawingml/2006/main" xmlns:r="http://schemas.openxmlformats.org/officeDocument/2006/relationships" xmlns:p="http://schemas.openxmlformats.org/presentationml/2006/main">
+  <p:cSld>
+    <p:spTree>
+      <p:nvGrpSpPr>
+        <p:cNvPr id="1" name=""/>
+        <p:cNvGrpSpPr/>
+        <p:nvPr/>
+      </p:nvGrpSpPr>
+      <p:grpSpPr>
+        <a:xfrm>
+          <a:off x="0" y="0"/>
+          <a:ext cx="0" cy="0"/>
+          <a:chOff x="0" y="0"/>
+          <a:chExt cx="0" cy="0"/>
+        </a:xfrm>
+      </p:grpSpPr>
+      <p:sp>
+        <p:nvSpPr>
+          <p:cNvPr id="2" name="Slide Image Placeholder 1"/>
+          <p:cNvSpPr>
+            <a:spLocks noGrp="1" noRot="1" noChangeAspect="1"/>
+          </p:cNvSpPr>
+          <p:nvPr>
+            <p:ph type="sldImg"/>
+          </p:nvPr>
+        </p:nvSpPr>
+        <p:spPr/>
+      </p:sp>
+      <p:sp>
+        <p:nvSpPr>
+          <p:cNvPr id="3" name="Notes Placeholder 2"/>
+          <p:cNvSpPr>
+            <a:spLocks noGrp="1"/>
+          </p:cNvSpPr>
+          <p:nvPr>
+            <p:ph type="body" idx="1"/>
+          </p:nvPr>
+        </p:nvSpPr>
+        <p:spPr/>
+        <p:txBody>
+          <a:bodyPr/>
+          <a:lstStyle/>
+          <a:p>
+            <a:endParaRPr lang="en-SE" dirty="0"/>
+          </a:p>
+        </p:txBody>
+      </p:sp>
+      <p:sp>
+        <p:nvSpPr>
+          <p:cNvPr id="4" name="Slide Number Placeholder 3"/>
+          <p:cNvSpPr>
+            <a:spLocks noGrp="1"/>
+          </p:cNvSpPr>
+          <p:nvPr>
+            <p:ph type="sldNum" sz="quarter" idx="5"/>
+          </p:nvPr>
+        </p:nvSpPr>
+        <p:spPr/>
+        <p:txBody>
+          <a:bodyPr/>
+          <a:lstStyle/>
+          <a:p>
+            <a:fld id="{CB8D2482-335E-734C-B42B-0D7FE3343100}" type="slidenum">
+              <a:rPr lang="en-SE" smtClean="0"/>
+              <a:t>14</a:t>
             </a:fld>
             <a:endParaRPr lang="en-SE"/>
           </a:p>
@@ -3228,7 +3413,7 @@
             </a:r>
             <a:r>
               <a:rPr lang="en-GB" dirty="0"/>
-              <a:t>: The name of the sequence (typically a chromosome).</a:t>
+              <a:t>: The name of the sequence (typically a chromosome number).</a:t>
             </a:r>
           </a:p>
           <a:p>
@@ -3270,7 +3455,15 @@
             </a:r>
             <a:r>
               <a:rPr lang="en-GB" dirty="0"/>
-              <a:t>: The starting position of the feature in the sequence.</a:t>
+              <a:t>: The starting position of the feature in the sequence, </a:t>
+            </a:r>
+            <a:r>
+              <a:rPr lang="en-GB" b="1" dirty="0"/>
+              <a:t>starting from 1</a:t>
+            </a:r>
+            <a:r>
+              <a:rPr lang="en-GB" dirty="0"/>
+              <a:t>.</a:t>
             </a:r>
           </a:p>
           <a:p>
@@ -3284,7 +3477,15 @@
             </a:r>
             <a:r>
               <a:rPr lang="en-GB" dirty="0"/>
-              <a:t>: The ending position of the feature in the sequence.</a:t>
+              <a:t>: The ending position of the feature in the sequence, </a:t>
+            </a:r>
+            <a:r>
+              <a:rPr lang="en-GB" b="1" dirty="0"/>
+              <a:t>end position included</a:t>
+            </a:r>
+            <a:r>
+              <a:rPr lang="en-GB" dirty="0"/>
+              <a:t>.</a:t>
             </a:r>
           </a:p>
           <a:p>
@@ -3312,7 +3513,15 @@
             </a:r>
             <a:r>
               <a:rPr lang="en-GB" dirty="0"/>
-              <a:t>: The strand on which the feature is located (`+` for the forward strand, `-` for the reverse strand).</a:t>
+              <a:t>: The strand on which the feature is located (`+` for the forward strand, `-` for the reverse strand). (</a:t>
+            </a:r>
+            <a:r>
+              <a:rPr lang="en-GB" b="1" dirty="0"/>
+              <a:t>only forward strand in this project</a:t>
+            </a:r>
+            <a:r>
+              <a:rPr lang="en-GB" dirty="0"/>
+              <a:t>)</a:t>
             </a:r>
           </a:p>
           <a:p>
@@ -3368,6 +3577,7 @@
           </a:bodyPr>
           <a:lstStyle/>
           <a:p>
+            <a:pPr algn="l"/>
             <a:r>
               <a:rPr lang="en-GB" sz="4000" dirty="0"/>
               <a:t>Columns of GTF file</a:t>
@@ -3431,8 +3641,12 @@
               <a:buChar char="o"/>
             </a:pPr>
             <a:r>
+              <a:rPr lang="en-GB" sz="2000" b="1" dirty="0"/>
+              <a:t>A semicolon (;)</a:t>
+            </a:r>
+            <a:r>
               <a:rPr lang="en-GB" sz="2000" dirty="0"/>
-              <a:t>A semicolon (;)-separated list of key-value pairs </a:t>
+              <a:t>-separated list of key-value pairs </a:t>
             </a:r>
           </a:p>
           <a:p>
@@ -3610,6 +3824,7 @@
           <a:bodyPr/>
           <a:lstStyle/>
           <a:p>
+            <a:pPr algn="l"/>
             <a:r>
               <a:rPr lang="en-GB" dirty="0"/>
               <a:t>Attribute of GTF</a:t>
@@ -4370,6 +4585,7 @@
           </a:bodyPr>
           <a:lstStyle/>
           <a:p>
+            <a:pPr algn="l"/>
             <a:r>
               <a:rPr lang="en-SE" sz="4000" dirty="0"/>
               <a:t>GTF example</a:t>
@@ -4391,6 +4607,440 @@
 </file>
 
 <file path=ppt/slides/slide13.xml><?xml version="1.0" encoding="utf-8"?>
+<p:sld xmlns:a="http://schemas.openxmlformats.org/drawingml/2006/main" xmlns:r="http://schemas.openxmlformats.org/officeDocument/2006/relationships" xmlns:p="http://schemas.openxmlformats.org/presentationml/2006/main">
+  <p:cSld>
+    <p:spTree>
+      <p:nvGrpSpPr>
+        <p:cNvPr id="1" name=""/>
+        <p:cNvGrpSpPr/>
+        <p:nvPr/>
+      </p:nvGrpSpPr>
+      <p:grpSpPr>
+        <a:xfrm>
+          <a:off x="0" y="0"/>
+          <a:ext cx="0" cy="0"/>
+          <a:chOff x="0" y="0"/>
+          <a:chExt cx="0" cy="0"/>
+        </a:xfrm>
+      </p:grpSpPr>
+      <p:sp>
+        <p:nvSpPr>
+          <p:cNvPr id="3" name="Title 2">
+            <a:extLst>
+              <a:ext uri="{FF2B5EF4-FFF2-40B4-BE49-F238E27FC236}">
+                <a16:creationId xmlns:a16="http://schemas.microsoft.com/office/drawing/2014/main" id="{DD84B62B-8B79-2806-71BA-7EBB3BC14141}"/>
+              </a:ext>
+            </a:extLst>
+          </p:cNvPr>
+          <p:cNvSpPr>
+            <a:spLocks noGrp="1"/>
+          </p:cNvSpPr>
+          <p:nvPr>
+            <p:ph type="title"/>
+          </p:nvPr>
+        </p:nvSpPr>
+        <p:spPr/>
+        <p:txBody>
+          <a:bodyPr/>
+          <a:lstStyle/>
+          <a:p>
+            <a:pPr algn="l"/>
+            <a:r>
+              <a:rPr lang="en-SE" dirty="0"/>
+              <a:t>How to get DNA sequence of a gene</a:t>
+            </a:r>
+          </a:p>
+        </p:txBody>
+      </p:sp>
+      <p:sp>
+        <p:nvSpPr>
+          <p:cNvPr id="5" name="TextBox 4">
+            <a:extLst>
+              <a:ext uri="{FF2B5EF4-FFF2-40B4-BE49-F238E27FC236}">
+                <a16:creationId xmlns:a16="http://schemas.microsoft.com/office/drawing/2014/main" id="{823B81A2-417B-5BC0-0E94-899075C20790}"/>
+              </a:ext>
+            </a:extLst>
+          </p:cNvPr>
+          <p:cNvSpPr txBox="1"/>
+          <p:nvPr/>
+        </p:nvSpPr>
+        <p:spPr>
+          <a:xfrm>
+            <a:off x="431208" y="950762"/>
+            <a:ext cx="11329599" cy="954107"/>
+          </a:xfrm>
+          <a:prstGeom prst="rect">
+            <a:avLst/>
+          </a:prstGeom>
+          <a:noFill/>
+        </p:spPr>
+        <p:txBody>
+          <a:bodyPr wrap="square">
+            <a:spAutoFit/>
+          </a:bodyPr>
+          <a:lstStyle/>
+          <a:p>
+            <a:pPr marL="0" indent="0" algn="just">
+              <a:buNone/>
+            </a:pPr>
+            <a:r>
+              <a:rPr lang="en-GB" sz="1400" dirty="0">
+                <a:latin typeface="Courier New" panose="02070309020205020404" pitchFamily="49" charset="0"/>
+                <a:cs typeface="Courier New" panose="02070309020205020404" pitchFamily="49" charset="0"/>
+              </a:rPr>
+              <a:t>&lt;</a:t>
+            </a:r>
+            <a:r>
+              <a:rPr lang="en-GB" sz="1400" dirty="0" err="1">
+                <a:latin typeface="Courier New" panose="02070309020205020404" pitchFamily="49" charset="0"/>
+                <a:cs typeface="Courier New" panose="02070309020205020404" pitchFamily="49" charset="0"/>
+              </a:rPr>
+              <a:t>seqname</a:t>
+            </a:r>
+            <a:r>
+              <a:rPr lang="en-GB" sz="1400" dirty="0">
+                <a:latin typeface="Courier New" panose="02070309020205020404" pitchFamily="49" charset="0"/>
+                <a:cs typeface="Courier New" panose="02070309020205020404" pitchFamily="49" charset="0"/>
+              </a:rPr>
+              <a:t>&gt; &lt;source&gt; &lt;feature&gt; &lt;start&gt; &lt;end&gt; &lt;score&gt; &lt;strand&gt; &lt;frame&gt; [attributes]</a:t>
+            </a:r>
+          </a:p>
+          <a:p>
+            <a:pPr marL="0" indent="0" algn="just">
+              <a:buNone/>
+            </a:pPr>
+            <a:endParaRPr lang="en-GB" sz="1400" dirty="0">
+              <a:latin typeface="Courier New" panose="02070309020205020404" pitchFamily="49" charset="0"/>
+              <a:cs typeface="Courier New" panose="02070309020205020404" pitchFamily="49" charset="0"/>
+            </a:endParaRPr>
+          </a:p>
+          <a:p>
+            <a:pPr marL="0" indent="0" algn="just">
+              <a:buNone/>
+            </a:pPr>
+            <a:r>
+              <a:rPr lang="en-GB" sz="1400" dirty="0">
+                <a:latin typeface="Courier New" panose="02070309020205020404" pitchFamily="49" charset="0"/>
+                <a:cs typeface="Courier New" panose="02070309020205020404" pitchFamily="49" charset="0"/>
+              </a:rPr>
+              <a:t>1 </a:t>
+            </a:r>
+            <a:r>
+              <a:rPr lang="en-GB" sz="1400" dirty="0" err="1">
+                <a:latin typeface="Courier New" panose="02070309020205020404" pitchFamily="49" charset="0"/>
+                <a:cs typeface="Courier New" panose="02070309020205020404" pitchFamily="49" charset="0"/>
+              </a:rPr>
+              <a:t>havana</a:t>
+            </a:r>
+            <a:r>
+              <a:rPr lang="en-GB" sz="1400" dirty="0">
+                <a:latin typeface="Courier New" panose="02070309020205020404" pitchFamily="49" charset="0"/>
+                <a:cs typeface="Courier New" panose="02070309020205020404" pitchFamily="49" charset="0"/>
+              </a:rPr>
+              <a:t> gene 11869 14409 . + . </a:t>
+            </a:r>
+            <a:r>
+              <a:rPr lang="en-GB" sz="1400" dirty="0" err="1">
+                <a:latin typeface="Courier New" panose="02070309020205020404" pitchFamily="49" charset="0"/>
+                <a:cs typeface="Courier New" panose="02070309020205020404" pitchFamily="49" charset="0"/>
+              </a:rPr>
+              <a:t>gene_id</a:t>
+            </a:r>
+            <a:r>
+              <a:rPr lang="en-GB" sz="1400" dirty="0">
+                <a:latin typeface="Courier New" panose="02070309020205020404" pitchFamily="49" charset="0"/>
+                <a:cs typeface="Courier New" panose="02070309020205020404" pitchFamily="49" charset="0"/>
+              </a:rPr>
+              <a:t> "ENSG00000223972"; </a:t>
+            </a:r>
+            <a:r>
+              <a:rPr lang="en-GB" sz="1400" dirty="0" err="1">
+                <a:latin typeface="Courier New" panose="02070309020205020404" pitchFamily="49" charset="0"/>
+                <a:cs typeface="Courier New" panose="02070309020205020404" pitchFamily="49" charset="0"/>
+              </a:rPr>
+              <a:t>gene_version</a:t>
+            </a:r>
+            <a:r>
+              <a:rPr lang="en-GB" sz="1400" dirty="0">
+                <a:latin typeface="Courier New" panose="02070309020205020404" pitchFamily="49" charset="0"/>
+                <a:cs typeface="Courier New" panose="02070309020205020404" pitchFamily="49" charset="0"/>
+              </a:rPr>
+              <a:t> "5"; </a:t>
+            </a:r>
+            <a:r>
+              <a:rPr lang="en-GB" sz="1400" dirty="0" err="1">
+                <a:latin typeface="Courier New" panose="02070309020205020404" pitchFamily="49" charset="0"/>
+                <a:cs typeface="Courier New" panose="02070309020205020404" pitchFamily="49" charset="0"/>
+              </a:rPr>
+              <a:t>gene_name</a:t>
+            </a:r>
+            <a:r>
+              <a:rPr lang="en-GB" sz="1400" dirty="0">
+                <a:latin typeface="Courier New" panose="02070309020205020404" pitchFamily="49" charset="0"/>
+                <a:cs typeface="Courier New" panose="02070309020205020404" pitchFamily="49" charset="0"/>
+              </a:rPr>
+              <a:t> "DDX11L1"; </a:t>
+            </a:r>
+            <a:r>
+              <a:rPr lang="en-GB" sz="1400" dirty="0" err="1">
+                <a:latin typeface="Courier New" panose="02070309020205020404" pitchFamily="49" charset="0"/>
+                <a:cs typeface="Courier New" panose="02070309020205020404" pitchFamily="49" charset="0"/>
+              </a:rPr>
+              <a:t>gene_source</a:t>
+            </a:r>
+            <a:r>
+              <a:rPr lang="en-GB" sz="1400" dirty="0">
+                <a:latin typeface="Courier New" panose="02070309020205020404" pitchFamily="49" charset="0"/>
+                <a:cs typeface="Courier New" panose="02070309020205020404" pitchFamily="49" charset="0"/>
+              </a:rPr>
+              <a:t> "</a:t>
+            </a:r>
+            <a:r>
+              <a:rPr lang="en-GB" sz="1400" dirty="0" err="1">
+                <a:latin typeface="Courier New" panose="02070309020205020404" pitchFamily="49" charset="0"/>
+                <a:cs typeface="Courier New" panose="02070309020205020404" pitchFamily="49" charset="0"/>
+              </a:rPr>
+              <a:t>havana</a:t>
+            </a:r>
+            <a:r>
+              <a:rPr lang="en-GB" sz="1400" dirty="0">
+                <a:latin typeface="Courier New" panose="02070309020205020404" pitchFamily="49" charset="0"/>
+                <a:cs typeface="Courier New" panose="02070309020205020404" pitchFamily="49" charset="0"/>
+              </a:rPr>
+              <a:t>"; </a:t>
+            </a:r>
+            <a:r>
+              <a:rPr lang="en-GB" sz="1400" dirty="0" err="1">
+                <a:latin typeface="Courier New" panose="02070309020205020404" pitchFamily="49" charset="0"/>
+                <a:cs typeface="Courier New" panose="02070309020205020404" pitchFamily="49" charset="0"/>
+              </a:rPr>
+              <a:t>gene_biotype</a:t>
+            </a:r>
+            <a:r>
+              <a:rPr lang="en-GB" sz="1400" dirty="0">
+                <a:latin typeface="Courier New" panose="02070309020205020404" pitchFamily="49" charset="0"/>
+                <a:cs typeface="Courier New" panose="02070309020205020404" pitchFamily="49" charset="0"/>
+              </a:rPr>
+              <a:t> "</a:t>
+            </a:r>
+            <a:r>
+              <a:rPr lang="en-GB" sz="1400" dirty="0" err="1">
+                <a:latin typeface="Courier New" panose="02070309020205020404" pitchFamily="49" charset="0"/>
+                <a:cs typeface="Courier New" panose="02070309020205020404" pitchFamily="49" charset="0"/>
+              </a:rPr>
+              <a:t>transcribed_unprocessed_pseudogene</a:t>
+            </a:r>
+            <a:r>
+              <a:rPr lang="en-GB" sz="1400" dirty="0">
+                <a:latin typeface="Courier New" panose="02070309020205020404" pitchFamily="49" charset="0"/>
+                <a:cs typeface="Courier New" panose="02070309020205020404" pitchFamily="49" charset="0"/>
+              </a:rPr>
+              <a:t>";</a:t>
+            </a:r>
+          </a:p>
+        </p:txBody>
+      </p:sp>
+      <p:sp>
+        <p:nvSpPr>
+          <p:cNvPr id="6" name="TextBox 5">
+            <a:extLst>
+              <a:ext uri="{FF2B5EF4-FFF2-40B4-BE49-F238E27FC236}">
+                <a16:creationId xmlns:a16="http://schemas.microsoft.com/office/drawing/2014/main" id="{198DACA4-7B9F-7B74-84F4-9218B018BB4A}"/>
+              </a:ext>
+            </a:extLst>
+          </p:cNvPr>
+          <p:cNvSpPr txBox="1"/>
+          <p:nvPr/>
+        </p:nvSpPr>
+        <p:spPr>
+          <a:xfrm>
+            <a:off x="239843" y="2535864"/>
+            <a:ext cx="11952157" cy="3493264"/>
+          </a:xfrm>
+          <a:prstGeom prst="rect">
+            <a:avLst/>
+          </a:prstGeom>
+          <a:noFill/>
+        </p:spPr>
+        <p:txBody>
+          <a:bodyPr wrap="square">
+            <a:spAutoFit/>
+          </a:bodyPr>
+          <a:lstStyle/>
+          <a:p>
+            <a:pPr marL="342900" indent="-342900">
+              <a:spcBef>
+                <a:spcPts val="600"/>
+              </a:spcBef>
+              <a:buFont typeface="Arial" panose="020B0604020202020204" pitchFamily="34" charset="0"/>
+              <a:buChar char="•"/>
+            </a:pPr>
+            <a:r>
+              <a:rPr lang="en-GB" sz="2400" dirty="0">
+                <a:latin typeface="+mn-lt"/>
+                <a:cs typeface="Courier New" panose="02070309020205020404" pitchFamily="49" charset="0"/>
+              </a:rPr>
+              <a:t>Get full DNA sequence of human ch7 from the file "</a:t>
+            </a:r>
+            <a:r>
+              <a:rPr lang="en-GB" sz="2400" dirty="0">
+                <a:latin typeface="Andale Mono" panose="020B0509000000000004" pitchFamily="49" charset="0"/>
+                <a:cs typeface="Courier New" panose="02070309020205020404" pitchFamily="49" charset="0"/>
+              </a:rPr>
+              <a:t>Homo_sapiens.GRCh38.dna_sm.chromosome.7.fa</a:t>
+            </a:r>
+            <a:r>
+              <a:rPr lang="en-GB" sz="2400" dirty="0">
+                <a:latin typeface="+mn-lt"/>
+                <a:cs typeface="Courier New" panose="02070309020205020404" pitchFamily="49" charset="0"/>
+              </a:rPr>
+              <a:t>”</a:t>
+            </a:r>
+          </a:p>
+          <a:p>
+            <a:pPr marL="342900" indent="-342900">
+              <a:spcBef>
+                <a:spcPts val="600"/>
+              </a:spcBef>
+              <a:buFont typeface="Arial" panose="020B0604020202020204" pitchFamily="34" charset="0"/>
+              <a:buChar char="•"/>
+            </a:pPr>
+            <a:r>
+              <a:rPr lang="en-GB" sz="2400" dirty="0">
+                <a:latin typeface="+mn-lt"/>
+                <a:cs typeface="Courier New" panose="02070309020205020404" pitchFamily="49" charset="0"/>
+              </a:rPr>
+              <a:t>The position is 1-based, with both ends included</a:t>
+            </a:r>
+          </a:p>
+          <a:p>
+            <a:pPr marL="0" indent="0">
+              <a:buNone/>
+            </a:pPr>
+            <a:endParaRPr lang="en-GB" sz="2400" dirty="0">
+              <a:latin typeface="+mn-lt"/>
+              <a:cs typeface="Courier New" panose="02070309020205020404" pitchFamily="49" charset="0"/>
+            </a:endParaRPr>
+          </a:p>
+          <a:p>
+            <a:pPr marL="0" indent="0">
+              <a:buNone/>
+            </a:pPr>
+            <a:r>
+              <a:rPr lang="en-GB" sz="2400" dirty="0" err="1">
+                <a:latin typeface="Andale Mono" panose="020B0509000000000004" pitchFamily="49" charset="0"/>
+                <a:cs typeface="Courier New" panose="02070309020205020404" pitchFamily="49" charset="0"/>
+              </a:rPr>
+              <a:t>start_pos</a:t>
+            </a:r>
+            <a:r>
+              <a:rPr lang="en-GB" sz="2400" dirty="0">
+                <a:latin typeface="Andale Mono" panose="020B0509000000000004" pitchFamily="49" charset="0"/>
+                <a:cs typeface="Courier New" panose="02070309020205020404" pitchFamily="49" charset="0"/>
+              </a:rPr>
+              <a:t> = 11869</a:t>
+            </a:r>
+          </a:p>
+          <a:p>
+            <a:pPr marL="0" indent="0">
+              <a:buNone/>
+            </a:pPr>
+            <a:r>
+              <a:rPr lang="en-GB" sz="2400" dirty="0" err="1">
+                <a:latin typeface="Andale Mono" panose="020B0509000000000004" pitchFamily="49" charset="0"/>
+                <a:cs typeface="Courier New" panose="02070309020205020404" pitchFamily="49" charset="0"/>
+              </a:rPr>
+              <a:t>end_pos</a:t>
+            </a:r>
+            <a:r>
+              <a:rPr lang="en-GB" sz="2400" dirty="0">
+                <a:latin typeface="Andale Mono" panose="020B0509000000000004" pitchFamily="49" charset="0"/>
+                <a:cs typeface="Courier New" panose="02070309020205020404" pitchFamily="49" charset="0"/>
+              </a:rPr>
+              <a:t> = 14409</a:t>
+            </a:r>
+          </a:p>
+          <a:p>
+            <a:pPr marL="0" indent="0">
+              <a:buNone/>
+            </a:pPr>
+            <a:endParaRPr lang="en-GB" sz="2400" dirty="0">
+              <a:latin typeface="Andale Mono" panose="020B0509000000000004" pitchFamily="49" charset="0"/>
+              <a:cs typeface="Courier New" panose="02070309020205020404" pitchFamily="49" charset="0"/>
+            </a:endParaRPr>
+          </a:p>
+          <a:p>
+            <a:pPr marL="0" indent="0">
+              <a:buNone/>
+            </a:pPr>
+            <a:r>
+              <a:rPr lang="en-GB" sz="2400" dirty="0" err="1">
+                <a:latin typeface="Andale Mono" panose="020B0509000000000004" pitchFamily="49" charset="0"/>
+                <a:cs typeface="Courier New" panose="02070309020205020404" pitchFamily="49" charset="0"/>
+              </a:rPr>
+              <a:t>seq_gene</a:t>
+            </a:r>
+            <a:r>
+              <a:rPr lang="en-GB" sz="2400" dirty="0">
+                <a:latin typeface="Andale Mono" panose="020B0509000000000004" pitchFamily="49" charset="0"/>
+                <a:cs typeface="Courier New" panose="02070309020205020404" pitchFamily="49" charset="0"/>
+              </a:rPr>
+              <a:t> = ch7_dna_sequence[</a:t>
+            </a:r>
+            <a:r>
+              <a:rPr lang="en-GB" sz="2400" dirty="0" err="1">
+                <a:latin typeface="Andale Mono" panose="020B0509000000000004" pitchFamily="49" charset="0"/>
+                <a:cs typeface="Courier New" panose="02070309020205020404" pitchFamily="49" charset="0"/>
+              </a:rPr>
+              <a:t>start_pos</a:t>
+            </a:r>
+            <a:r>
+              <a:rPr lang="en-GB" sz="2400" dirty="0">
+                <a:latin typeface="Andale Mono" panose="020B0509000000000004" pitchFamily="49" charset="0"/>
+                <a:cs typeface="Courier New" panose="02070309020205020404" pitchFamily="49" charset="0"/>
+              </a:rPr>
+              <a:t> </a:t>
+            </a:r>
+            <a:r>
+              <a:rPr lang="en-GB" sz="2400" b="1" dirty="0">
+                <a:latin typeface="Andale Mono" panose="020B0509000000000004" pitchFamily="49" charset="0"/>
+                <a:cs typeface="Courier New" panose="02070309020205020404" pitchFamily="49" charset="0"/>
+              </a:rPr>
+              <a:t>- 1</a:t>
+            </a:r>
+            <a:r>
+              <a:rPr lang="en-GB" sz="2400" dirty="0">
+                <a:latin typeface="Andale Mono" panose="020B0509000000000004" pitchFamily="49" charset="0"/>
+                <a:cs typeface="Courier New" panose="02070309020205020404" pitchFamily="49" charset="0"/>
+              </a:rPr>
+              <a:t>:end_pos]</a:t>
+            </a:r>
+          </a:p>
+          <a:p>
+            <a:pPr marL="0" indent="0" algn="just">
+              <a:buNone/>
+            </a:pPr>
+            <a:endParaRPr lang="en-GB" sz="2400" dirty="0">
+              <a:latin typeface="+mn-lt"/>
+              <a:cs typeface="Courier New" panose="02070309020205020404" pitchFamily="49" charset="0"/>
+            </a:endParaRPr>
+          </a:p>
+        </p:txBody>
+      </p:sp>
+    </p:spTree>
+    <p:extLst>
+      <p:ext uri="{BB962C8B-B14F-4D97-AF65-F5344CB8AC3E}">
+        <p14:creationId xmlns:p14="http://schemas.microsoft.com/office/powerpoint/2010/main" val="505680141"/>
+      </p:ext>
+    </p:extLst>
+  </p:cSld>
+  <p:clrMapOvr>
+    <a:masterClrMapping/>
+  </p:clrMapOvr>
+</p:sld>
+</file>
+
+<file path=ppt/slides/slide14.xml><?xml version="1.0" encoding="utf-8"?>
 <p:sld xmlns:a="http://schemas.openxmlformats.org/drawingml/2006/main" xmlns:r="http://schemas.openxmlformats.org/officeDocument/2006/relationships" xmlns:p="http://schemas.openxmlformats.org/presentationml/2006/main">
   <p:cSld>
     <p:spTree>
@@ -4580,6 +5230,7 @@
           </a:bodyPr>
           <a:lstStyle/>
           <a:p>
+            <a:pPr algn="l"/>
             <a:r>
               <a:rPr lang="en-SE" sz="4000" dirty="0"/>
               <a:t>Getting started</a:t>
@@ -4591,6 +5242,64 @@
     <p:extLst>
       <p:ext uri="{BB962C8B-B14F-4D97-AF65-F5344CB8AC3E}">
         <p14:creationId xmlns:p14="http://schemas.microsoft.com/office/powerpoint/2010/main" val="3452865803"/>
+      </p:ext>
+    </p:extLst>
+  </p:cSld>
+  <p:clrMapOvr>
+    <a:masterClrMapping/>
+  </p:clrMapOvr>
+</p:sld>
+</file>
+
+<file path=ppt/slides/slide15.xml><?xml version="1.0" encoding="utf-8"?>
+<p:sld xmlns:a="http://schemas.openxmlformats.org/drawingml/2006/main" xmlns:r="http://schemas.openxmlformats.org/officeDocument/2006/relationships" xmlns:p="http://schemas.openxmlformats.org/presentationml/2006/main">
+  <p:cSld>
+    <p:spTree>
+      <p:nvGrpSpPr>
+        <p:cNvPr id="1" name=""/>
+        <p:cNvGrpSpPr/>
+        <p:nvPr/>
+      </p:nvGrpSpPr>
+      <p:grpSpPr>
+        <a:xfrm>
+          <a:off x="0" y="0"/>
+          <a:ext cx="0" cy="0"/>
+          <a:chOff x="0" y="0"/>
+          <a:chExt cx="0" cy="0"/>
+        </a:xfrm>
+      </p:grpSpPr>
+      <p:sp>
+        <p:nvSpPr>
+          <p:cNvPr id="4" name="Title 3">
+            <a:extLst>
+              <a:ext uri="{FF2B5EF4-FFF2-40B4-BE49-F238E27FC236}">
+                <a16:creationId xmlns:a16="http://schemas.microsoft.com/office/drawing/2014/main" id="{F432F46F-DEC2-23EC-DC03-0916ED5CFFEF}"/>
+              </a:ext>
+            </a:extLst>
+          </p:cNvPr>
+          <p:cNvSpPr>
+            <a:spLocks noGrp="1"/>
+          </p:cNvSpPr>
+          <p:nvPr>
+            <p:ph type="ctrTitle"/>
+          </p:nvPr>
+        </p:nvSpPr>
+        <p:spPr/>
+        <p:txBody>
+          <a:bodyPr/>
+          <a:lstStyle/>
+          <a:p>
+            <a:r>
+              <a:rPr lang="en-SE" dirty="0"/>
+              <a:t>Questions?</a:t>
+            </a:r>
+          </a:p>
+        </p:txBody>
+      </p:sp>
+    </p:spTree>
+    <p:extLst>
+      <p:ext uri="{BB962C8B-B14F-4D97-AF65-F5344CB8AC3E}">
+        <p14:creationId xmlns:p14="http://schemas.microsoft.com/office/powerpoint/2010/main" val="1695921036"/>
       </p:ext>
     </p:extLst>
   </p:cSld>
@@ -4980,7 +5689,7 @@
               <a:rPr lang="en-GB" sz="2800" dirty="0">
                 <a:latin typeface="Calibri" panose="020F0502020204030204" pitchFamily="34" charset="0"/>
               </a:rPr>
-              <a:t>TAs available for questions</a:t>
+              <a:t>TAs are available for questions</a:t>
             </a:r>
           </a:p>
           <a:p>
@@ -5053,6 +5762,7 @@
           </a:bodyPr>
           <a:lstStyle/>
           <a:p>
+            <a:pPr algn="l"/>
             <a:r>
               <a:rPr lang="en-GB" sz="4000" dirty="0"/>
               <a:t>Practical information</a:t>
@@ -5382,7 +6092,7 @@
             </a:pPr>
             <a:r>
               <a:rPr lang="en-GB" sz="2400" dirty="0"/>
-              <a:t>Genetic inherited disease</a:t>
+              <a:t>Genetically inherited disease</a:t>
             </a:r>
           </a:p>
           <a:p>
@@ -5392,7 +6102,7 @@
             </a:pPr>
             <a:r>
               <a:rPr lang="en-GB" sz="2400" dirty="0"/>
-              <a:t>Produces thick and sticky mucus in organs, including lungs and the pancreas</a:t>
+              <a:t>Produces thick and sticky mucus in organs, including the lungs and pancreas</a:t>
             </a:r>
           </a:p>
           <a:p>
@@ -5402,7 +6112,7 @@
             </a:pPr>
             <a:r>
               <a:rPr lang="en-GB" sz="2400" dirty="0"/>
-              <a:t>Clogs the airways of patients and makes them difficult to breathe</a:t>
+              <a:t>Clogs the airways and makes it difficult for patients to breathe</a:t>
             </a:r>
           </a:p>
           <a:p>
@@ -5412,7 +6122,7 @@
             </a:pPr>
             <a:r>
               <a:rPr lang="en-GB" sz="2400" dirty="0"/>
-              <a:t>No cure available but only symptom management, such as airway clearance</a:t>
+              <a:t>No cure is available; only symptom management, such as airway clearance</a:t>
             </a:r>
           </a:p>
         </p:txBody>
@@ -5432,7 +6142,7 @@
           <p:nvPr/>
         </p:nvPicPr>
         <p:blipFill>
-          <a:blip r:embed="rId2"/>
+          <a:blip r:embed="rId3"/>
           <a:stretch>
             <a:fillRect/>
           </a:stretch>
@@ -5510,6 +6220,7 @@
           </a:bodyPr>
           <a:lstStyle/>
           <a:p>
+            <a:pPr algn="l"/>
             <a:r>
               <a:rPr lang="en-GB" sz="4000" dirty="0"/>
               <a:t>Background</a:t>
@@ -5586,7 +6297,7 @@
             </a:pPr>
             <a:r>
               <a:rPr lang="en-GB" sz="2400" dirty="0"/>
-              <a:t>The CFTR protein is an ion channel protein, acting like gates in a cell membrane that control the traffic of molecules through the membrane.</a:t>
+              <a:t>The CFTR is an ion channel protein, acting like gates in a cell membrane that control the traffic of molecules through the membrane.</a:t>
             </a:r>
           </a:p>
           <a:p>
@@ -5634,6 +6345,7 @@
           </a:bodyPr>
           <a:lstStyle/>
           <a:p>
+            <a:pPr algn="l"/>
             <a:r>
               <a:rPr lang="en-GB" sz="4000" dirty="0"/>
               <a:t>Genomic facts of Cystic Fibrosis</a:t>
@@ -5663,8 +6375,8 @@
         </p:blipFill>
         <p:spPr>
           <a:xfrm>
-            <a:off x="8012624" y="4274921"/>
-            <a:ext cx="3159072" cy="1895443"/>
+            <a:off x="7533396" y="3987385"/>
+            <a:ext cx="3638300" cy="2182980"/>
           </a:xfrm>
           <a:prstGeom prst="rect">
             <a:avLst/>
@@ -5768,7 +6480,23 @@
             </a:pPr>
             <a:r>
               <a:rPr lang="en-GB" sz="2800" dirty="0"/>
-              <a:t>CFTR gene is located on chromosome 7 of the human genome</a:t>
+              <a:t>The </a:t>
+            </a:r>
+            <a:r>
+              <a:rPr lang="en-GB" sz="2800" b="1" dirty="0"/>
+              <a:t>CFTR gene </a:t>
+            </a:r>
+            <a:r>
+              <a:rPr lang="en-GB" sz="2800" dirty="0"/>
+              <a:t>is located on </a:t>
+            </a:r>
+            <a:r>
+              <a:rPr lang="en-GB" sz="2800" b="1" dirty="0"/>
+              <a:t>chromosome 7</a:t>
+            </a:r>
+            <a:r>
+              <a:rPr lang="en-GB" sz="2800" dirty="0"/>
+              <a:t> in the human genome</a:t>
             </a:r>
           </a:p>
           <a:p>
@@ -5778,7 +6506,7 @@
             </a:pPr>
             <a:r>
               <a:rPr lang="en-GB" sz="2800" dirty="0"/>
-              <a:t>Over 1,500 mutations known to cause CF</a:t>
+              <a:t>More than 1,500 mutations are known to cause cystic fibrosis (CF)</a:t>
             </a:r>
           </a:p>
           <a:p>
@@ -5788,20 +6516,30 @@
             </a:pPr>
             <a:r>
               <a:rPr lang="en-GB" sz="2800" dirty="0"/>
-              <a:t>One type of mutations</a:t>
-            </a:r>
-          </a:p>
-          <a:p>
-            <a:pPr marL="1257278" lvl="1" indent="-342900">
+              <a:t>One important class of mutations is non-synonymous mutations that introduce a </a:t>
+            </a:r>
+            <a:r>
+              <a:rPr lang="en-GB" sz="2800" b="1" dirty="0"/>
+              <a:t>premature termination codon (PTC)</a:t>
+            </a:r>
+            <a:r>
+              <a:rPr lang="en-GB" sz="2800" dirty="0"/>
+              <a:t>, resulting in a truncated (shortened) CFTR protein</a:t>
+            </a:r>
+          </a:p>
+          <a:p>
+            <a:pPr marL="761993" indent="-457200">
               <a:buFont typeface="Courier New" panose="02070309020205020404" pitchFamily="49" charset="0"/>
               <a:buChar char="o"/>
             </a:pPr>
             <a:r>
-              <a:rPr lang="en-GB" sz="2400" dirty="0"/>
-              <a:t>Non-synonymous (with amino acid changing) mutations that generate a premature termination codon (PTC), that further leads to a truncated CFTR protein (shortened length).</a:t>
-            </a:r>
-          </a:p>
-          <a:p>
+              <a:rPr lang="en-GB" sz="2800" b="1" dirty="0"/>
+              <a:t>We are particularly interested in mutations that create these premature stop signals</a:t>
+            </a:r>
+            <a:r>
+              <a:rPr lang="en-GB" sz="2800" dirty="0"/>
+              <a:t>, because they prevent the CFTR protein from being fully produced</a:t>
+            </a:r>
             <a:endParaRPr lang="en-GB" dirty="0"/>
           </a:p>
         </p:txBody>
@@ -5829,6 +6567,7 @@
           </a:bodyPr>
           <a:lstStyle/>
           <a:p>
+            <a:pPr algn="l"/>
             <a:r>
               <a:rPr lang="en-GB" sz="4000" dirty="0"/>
               <a:t>More about the CFTR gene</a:t>
@@ -5889,7 +6628,7 @@
           <a:p>
             <a:r>
               <a:rPr lang="en-GB" sz="2800" b="1" dirty="0"/>
-              <a:t>Write a python program that:</a:t>
+              <a:t>Write a Python program that:</a:t>
             </a:r>
           </a:p>
           <a:p>
@@ -5919,7 +6658,11 @@
             </a:pPr>
             <a:r>
               <a:rPr lang="en-GB" sz="2800" dirty="0"/>
-              <a:t>Determine if one or more patients have a premature stop codon</a:t>
+              <a:t>Determine if one or more patients have a premature stop codon, that is, </a:t>
+            </a:r>
+            <a:r>
+              <a:rPr lang="en-GB" sz="2800" b="1" dirty="0"/>
+              <a:t>which shortened amino acid sequence</a:t>
             </a:r>
           </a:p>
           <a:p>
@@ -5973,6 +6716,7 @@
           </a:bodyPr>
           <a:lstStyle/>
           <a:p>
+            <a:pPr algn="l"/>
             <a:r>
               <a:rPr lang="en-GB" sz="4000" dirty="0"/>
               <a:t>Goal of the project</a:t>
@@ -6033,6 +6777,7 @@
           </a:bodyPr>
           <a:lstStyle/>
           <a:p>
+            <a:pPr algn="l"/>
             <a:r>
               <a:rPr lang="en-GB" sz="4000" dirty="0"/>
               <a:t>Data</a:t>
@@ -6055,7 +6800,7 @@
           <p:nvPr>
             <p:extLst>
               <p:ext uri="{D42A27DB-BD31-4B8C-83A1-F6EECF244321}">
-                <p14:modId xmlns:p14="http://schemas.microsoft.com/office/powerpoint/2010/main" val="2711406304"/>
+                <p14:modId xmlns:p14="http://schemas.microsoft.com/office/powerpoint/2010/main" val="2680221082"/>
               </p:ext>
             </p:extLst>
           </p:nvPr>
@@ -6315,10 +7060,22 @@
                     <a:lstStyle/>
                     <a:p>
                       <a:r>
-                        <a:rPr lang="en-GB">
+                        <a:rPr lang="en-GB" dirty="0">
                           <a:effectLst/>
                         </a:rPr>
-                        <a:t>DNA sequence data for Patient 1 (fasta format)</a:t>
+                        <a:t>DNA sequence data of chr 7 for Patient 1 (</a:t>
+                      </a:r>
+                      <a:r>
+                        <a:rPr lang="en-GB" dirty="0" err="1">
+                          <a:effectLst/>
+                        </a:rPr>
+                        <a:t>fasta</a:t>
+                      </a:r>
+                      <a:r>
+                        <a:rPr lang="en-GB" dirty="0">
+                          <a:effectLst/>
+                        </a:rPr>
+                        <a:t> format)</a:t>
                       </a:r>
                     </a:p>
                   </a:txBody>
@@ -6380,10 +7137,22 @@
                     <a:lstStyle/>
                     <a:p>
                       <a:r>
-                        <a:rPr lang="en-GB">
+                        <a:rPr lang="en-GB" dirty="0">
                           <a:effectLst/>
                         </a:rPr>
-                        <a:t>DNA sequence data for Patient 2 (fasta format)</a:t>
+                        <a:t>DNA sequence data of chr 7 for Patient 2 (</a:t>
+                      </a:r>
+                      <a:r>
+                        <a:rPr lang="en-GB" dirty="0" err="1">
+                          <a:effectLst/>
+                        </a:rPr>
+                        <a:t>fasta</a:t>
+                      </a:r>
+                      <a:r>
+                        <a:rPr lang="en-GB" dirty="0">
+                          <a:effectLst/>
+                        </a:rPr>
+                        <a:t> format)</a:t>
                       </a:r>
                     </a:p>
                   </a:txBody>
@@ -6445,10 +7214,22 @@
                     <a:lstStyle/>
                     <a:p>
                       <a:r>
-                        <a:rPr lang="en-GB">
+                        <a:rPr lang="en-GB" dirty="0">
                           <a:effectLst/>
                         </a:rPr>
-                        <a:t>DNA sequence data for Patient 3 (fasta format)</a:t>
+                        <a:t>DNA sequence data of chr 7 for Patient 3 (</a:t>
+                      </a:r>
+                      <a:r>
+                        <a:rPr lang="en-GB" dirty="0" err="1">
+                          <a:effectLst/>
+                        </a:rPr>
+                        <a:t>fasta</a:t>
+                      </a:r>
+                      <a:r>
+                        <a:rPr lang="en-GB" dirty="0">
+                          <a:effectLst/>
+                        </a:rPr>
+                        <a:t> format)</a:t>
                       </a:r>
                     </a:p>
                   </a:txBody>
@@ -6510,10 +7291,22 @@
                     <a:lstStyle/>
                     <a:p>
                       <a:r>
-                        <a:rPr lang="en-GB">
+                        <a:rPr lang="en-GB" dirty="0">
                           <a:effectLst/>
                         </a:rPr>
-                        <a:t>DNA sequence data for Patient 4 (fasta format)</a:t>
+                        <a:t>DNA sequence data of chr 7 for Patient 4 (</a:t>
+                      </a:r>
+                      <a:r>
+                        <a:rPr lang="en-GB" dirty="0" err="1">
+                          <a:effectLst/>
+                        </a:rPr>
+                        <a:t>fasta</a:t>
+                      </a:r>
+                      <a:r>
+                        <a:rPr lang="en-GB" dirty="0">
+                          <a:effectLst/>
+                        </a:rPr>
+                        <a:t> format)</a:t>
                       </a:r>
                     </a:p>
                   </a:txBody>
@@ -6578,7 +7371,7 @@
                         <a:rPr lang="en-GB" dirty="0">
                           <a:effectLst/>
                         </a:rPr>
-                        <a:t>DNA sequence data for Patient 5 (</a:t>
+                        <a:t>DNA sequence data of chr 7 for Patient 5 (</a:t>
                       </a:r>
                       <a:r>
                         <a:rPr lang="en-GB" dirty="0" err="1">
@@ -6844,6 +7637,7 @@
           </a:bodyPr>
           <a:lstStyle/>
           <a:p>
+            <a:pPr algn="l"/>
             <a:r>
               <a:rPr lang="en-GB" sz="4000" dirty="0" err="1"/>
               <a:t>Fasta</a:t>
@@ -6922,7 +7716,7 @@
             </a:pPr>
             <a:r>
               <a:rPr lang="en-GB" dirty="0"/>
-              <a:t>Holds information about gene structure</a:t>
+              <a:t>Holds information about the gene structure</a:t>
             </a:r>
           </a:p>
           <a:p>
@@ -6932,7 +7726,7 @@
             </a:pPr>
             <a:r>
               <a:rPr lang="en-GB" dirty="0"/>
-              <a:t>Tab-delimited</a:t>
+              <a:t>Tab-delimited, i.e., columns are separated by tabs (‘\t’)</a:t>
             </a:r>
           </a:p>
           <a:p>
@@ -6963,6 +7757,7 @@
           </a:bodyPr>
           <a:lstStyle/>
           <a:p>
+            <a:pPr algn="l"/>
             <a:r>
               <a:rPr lang="en-GB" sz="4000" dirty="0"/>
               <a:t>GTF format</a:t>
